--- a/Yubico_Fido2_Demo介紹.pptx
+++ b/Yubico_Fido2_Demo介紹.pptx
@@ -5,17 +5,19 @@
     <p:sldMasterId id="2147483714" r:id="rId1"/>
   </p:sldMasterIdLst>
   <p:notesMasterIdLst>
-    <p:notesMasterId r:id="rId10"/>
+    <p:notesMasterId r:id="rId12"/>
   </p:notesMasterIdLst>
   <p:sldIdLst>
     <p:sldId id="256" r:id="rId2"/>
     <p:sldId id="257" r:id="rId3"/>
-    <p:sldId id="266" r:id="rId4"/>
-    <p:sldId id="272" r:id="rId5"/>
-    <p:sldId id="268" r:id="rId6"/>
-    <p:sldId id="273" r:id="rId7"/>
-    <p:sldId id="271" r:id="rId8"/>
-    <p:sldId id="270" r:id="rId9"/>
+    <p:sldId id="274" r:id="rId4"/>
+    <p:sldId id="266" r:id="rId5"/>
+    <p:sldId id="272" r:id="rId6"/>
+    <p:sldId id="268" r:id="rId7"/>
+    <p:sldId id="273" r:id="rId8"/>
+    <p:sldId id="271" r:id="rId9"/>
+    <p:sldId id="270" r:id="rId10"/>
+    <p:sldId id="275" r:id="rId11"/>
   </p:sldIdLst>
   <p:sldSz cx="12192000" cy="6858000"/>
   <p:notesSz cx="6858000" cy="9144000"/>
@@ -896,14 +898,14 @@
             </a:lnSpc>
           </a:pPr>
           <a:r>
-            <a:rPr lang="zh-TW" b="0" i="0"/>
+            <a:rPr lang="zh-TW" b="0" i="0" dirty="0"/>
             <a:t>前端 </a:t>
           </a:r>
           <a:r>
-            <a:rPr lang="en-US" b="0" i="0"/>
-            <a:t>Html + JaveScript</a:t>
+            <a:rPr lang="en-US" b="0" i="0" dirty="0"/>
+            <a:t>Html + JavaScript + Bootstrap  </a:t>
           </a:r>
-          <a:endParaRPr lang="en-US"/>
+          <a:endParaRPr lang="en-US" dirty="0"/>
         </a:p>
       </dgm:t>
     </dgm:pt>
@@ -964,6 +966,14 @@
           <a:r>
             <a:rPr lang="en-US" b="0" i="0" dirty="0"/>
             <a:t>fido2</a:t>
+          </a:r>
+          <a:r>
+            <a:rPr lang="zh-TW" altLang="en-US" b="0" i="0" dirty="0"/>
+            <a:t>、</a:t>
+          </a:r>
+          <a:r>
+            <a:rPr lang="en-US" altLang="zh-TW" b="0" i="0" dirty="0"/>
+            <a:t>SQLite</a:t>
           </a:r>
           <a:endParaRPr lang="en-US" dirty="0"/>
         </a:p>
@@ -1140,8 +1150,8 @@
       </dsp:nvSpPr>
       <dsp:spPr>
         <a:xfrm>
-          <a:off x="0" y="585196"/>
-          <a:ext cx="7335835" cy="1080363"/>
+          <a:off x="0" y="749949"/>
+          <a:ext cx="10233479" cy="1384521"/>
         </a:xfrm>
         <a:prstGeom prst="roundRect">
           <a:avLst>
@@ -1182,8 +1192,8 @@
       </dsp:nvSpPr>
       <dsp:spPr>
         <a:xfrm>
-          <a:off x="326809" y="828278"/>
-          <a:ext cx="594199" cy="594199"/>
+          <a:off x="418817" y="1061466"/>
+          <a:ext cx="761486" cy="761486"/>
         </a:xfrm>
         <a:prstGeom prst="rect">
           <a:avLst/>
@@ -1239,8 +1249,8 @@
       </dsp:nvSpPr>
       <dsp:spPr>
         <a:xfrm>
-          <a:off x="1247819" y="585196"/>
-          <a:ext cx="6088015" cy="1080363"/>
+          <a:off x="1599122" y="749949"/>
+          <a:ext cx="8634356" cy="1384521"/>
         </a:xfrm>
         <a:prstGeom prst="rect">
           <a:avLst/>
@@ -1264,7 +1274,7 @@
         <a:fontRef idx="minor"/>
       </dsp:style>
       <dsp:txBody>
-        <a:bodyPr spcFirstLastPara="0" vert="horz" wrap="square" lIns="114338" tIns="114338" rIns="114338" bIns="114338" numCol="1" spcCol="1270" anchor="ctr" anchorCtr="0">
+        <a:bodyPr spcFirstLastPara="0" vert="horz" wrap="square" lIns="146529" tIns="146529" rIns="146529" bIns="146529" numCol="1" spcCol="1270" anchor="ctr" anchorCtr="0">
           <a:noAutofit/>
         </a:bodyPr>
         <a:lstStyle/>
@@ -1282,19 +1292,19 @@
             <a:buNone/>
           </a:pPr>
           <a:r>
-            <a:rPr lang="zh-TW" sz="2500" b="0" i="0" kern="1200"/>
+            <a:rPr lang="zh-TW" sz="2500" b="0" i="0" kern="1200" dirty="0"/>
             <a:t>前端 </a:t>
           </a:r>
           <a:r>
-            <a:rPr lang="en-US" sz="2500" b="0" i="0" kern="1200"/>
-            <a:t>Html + JaveScript</a:t>
+            <a:rPr lang="en-US" sz="2500" b="0" i="0" kern="1200" dirty="0"/>
+            <a:t>Html + JavaScript + Bootstrap  </a:t>
           </a:r>
-          <a:endParaRPr lang="en-US" sz="2500" kern="1200"/>
+          <a:endParaRPr lang="en-US" sz="2500" kern="1200" dirty="0"/>
         </a:p>
       </dsp:txBody>
       <dsp:txXfrm>
-        <a:off x="1247819" y="585196"/>
-        <a:ext cx="6088015" cy="1080363"/>
+        <a:off x="1599122" y="749949"/>
+        <a:ext cx="8634356" cy="1384521"/>
       </dsp:txXfrm>
     </dsp:sp>
     <dsp:sp modelId="{E772C50C-CD8B-4D73-8FB1-F50C1BF7A65D}">
@@ -1304,8 +1314,8 @@
       </dsp:nvSpPr>
       <dsp:spPr>
         <a:xfrm>
-          <a:off x="0" y="1935651"/>
-          <a:ext cx="7335835" cy="1080363"/>
+          <a:off x="0" y="2480600"/>
+          <a:ext cx="10233479" cy="1384521"/>
         </a:xfrm>
         <a:prstGeom prst="roundRect">
           <a:avLst>
@@ -1346,8 +1356,8 @@
       </dsp:nvSpPr>
       <dsp:spPr>
         <a:xfrm>
-          <a:off x="326809" y="2178733"/>
-          <a:ext cx="594199" cy="594199"/>
+          <a:off x="418817" y="2792117"/>
+          <a:ext cx="761486" cy="761486"/>
         </a:xfrm>
         <a:prstGeom prst="rect">
           <a:avLst/>
@@ -1403,8 +1413,8 @@
       </dsp:nvSpPr>
       <dsp:spPr>
         <a:xfrm>
-          <a:off x="1247819" y="1935651"/>
-          <a:ext cx="6088015" cy="1080363"/>
+          <a:off x="1599122" y="2480600"/>
+          <a:ext cx="8634356" cy="1384521"/>
         </a:xfrm>
         <a:prstGeom prst="rect">
           <a:avLst/>
@@ -1428,7 +1438,7 @@
         <a:fontRef idx="minor"/>
       </dsp:style>
       <dsp:txBody>
-        <a:bodyPr spcFirstLastPara="0" vert="horz" wrap="square" lIns="114338" tIns="114338" rIns="114338" bIns="114338" numCol="1" spcCol="1270" anchor="ctr" anchorCtr="0">
+        <a:bodyPr spcFirstLastPara="0" vert="horz" wrap="square" lIns="146529" tIns="146529" rIns="146529" bIns="146529" numCol="1" spcCol="1270" anchor="ctr" anchorCtr="0">
           <a:noAutofit/>
         </a:bodyPr>
         <a:lstStyle/>
@@ -1469,12 +1479,20 @@
             <a:rPr lang="en-US" sz="2500" b="0" i="0" kern="1200" dirty="0"/>
             <a:t>fido2</a:t>
           </a:r>
+          <a:r>
+            <a:rPr lang="zh-TW" altLang="en-US" sz="2500" b="0" i="0" kern="1200" dirty="0"/>
+            <a:t>、</a:t>
+          </a:r>
+          <a:r>
+            <a:rPr lang="en-US" altLang="zh-TW" sz="2500" b="0" i="0" kern="1200" dirty="0"/>
+            <a:t>SQLite</a:t>
+          </a:r>
           <a:endParaRPr lang="en-US" sz="2500" kern="1200" dirty="0"/>
         </a:p>
       </dsp:txBody>
       <dsp:txXfrm>
-        <a:off x="1247819" y="1935651"/>
-        <a:ext cx="6088015" cy="1080363"/>
+        <a:off x="1599122" y="2480600"/>
+        <a:ext cx="8634356" cy="1384521"/>
       </dsp:txXfrm>
     </dsp:sp>
   </dsp:spTree>
@@ -2891,7 +2909,7 @@
           <a:p>
             <a:fld id="{D9AF2E3F-5533-4A72-AE10-87EE3298E589}" type="datetimeFigureOut">
               <a:rPr lang="zh-TW" altLang="en-US" smtClean="0"/>
-              <a:t>2025/3/11</a:t>
+              <a:t>2025/3/24</a:t>
             </a:fld>
             <a:endParaRPr lang="zh-TW" altLang="en-US"/>
           </a:p>
@@ -3223,7 +3241,7 @@
           <a:p>
             <a:fld id="{A7A57FFB-1F1B-4C86-9F8B-217896ED7C0C}" type="slidenum">
               <a:rPr lang="zh-TW" altLang="en-US" smtClean="0"/>
-              <a:t>4</a:t>
+              <a:t>5</a:t>
             </a:fld>
             <a:endParaRPr lang="zh-TW" altLang="en-US"/>
           </a:p>
@@ -5430,7 +5448,7 @@
             <a:fld id="{A5B0A250-5CC0-1746-B209-08E8B0DAE6AF}" type="datetimeFigureOut">
               <a:rPr lang="en-US" smtClean="0"/>
               <a:pPr algn="l"/>
-              <a:t>3/11/2025</a:t>
+              <a:t>3/24/2025</a:t>
             </a:fld>
             <a:endParaRPr lang="en-US" dirty="0"/>
           </a:p>
@@ -6892,7 +6910,7 @@
           <a:p>
             <a:fld id="{A5B0A250-5CC0-1746-B209-08E8B0DAE6AF}" type="datetimeFigureOut">
               <a:rPr lang="en-US" smtClean="0"/>
-              <a:t>3/11/2025</a:t>
+              <a:t>3/24/2025</a:t>
             </a:fld>
             <a:endParaRPr lang="en-US" dirty="0"/>
           </a:p>
@@ -7822,7 +7840,7 @@
           <a:p>
             <a:fld id="{A5B0A250-5CC0-1746-B209-08E8B0DAE6AF}" type="datetimeFigureOut">
               <a:rPr lang="en-US" smtClean="0"/>
-              <a:t>3/11/2025</a:t>
+              <a:t>3/24/2025</a:t>
             </a:fld>
             <a:endParaRPr lang="en-US"/>
           </a:p>
@@ -9279,7 +9297,7 @@
           <a:p>
             <a:fld id="{A5B0A250-5CC0-1746-B209-08E8B0DAE6AF}" type="datetimeFigureOut">
               <a:rPr lang="en-US" smtClean="0"/>
-              <a:t>3/11/2025</a:t>
+              <a:t>3/24/2025</a:t>
             </a:fld>
             <a:endParaRPr lang="en-US" dirty="0"/>
           </a:p>
@@ -11635,7 +11653,7 @@
           <a:p>
             <a:fld id="{A5B0A250-5CC0-1746-B209-08E8B0DAE6AF}" type="datetimeFigureOut">
               <a:rPr lang="en-US" smtClean="0"/>
-              <a:t>3/11/2025</a:t>
+              <a:t>3/24/2025</a:t>
             </a:fld>
             <a:endParaRPr lang="en-US" dirty="0"/>
           </a:p>
@@ -12676,7 +12694,7 @@
           <a:p>
             <a:fld id="{A5B0A250-5CC0-1746-B209-08E8B0DAE6AF}" type="datetimeFigureOut">
               <a:rPr lang="en-US" smtClean="0"/>
-              <a:t>3/11/2025</a:t>
+              <a:t>3/24/2025</a:t>
             </a:fld>
             <a:endParaRPr lang="en-US" dirty="0"/>
           </a:p>
@@ -13889,7 +13907,7 @@
           <a:p>
             <a:fld id="{A5B0A250-5CC0-1746-B209-08E8B0DAE6AF}" type="datetimeFigureOut">
               <a:rPr lang="en-US" smtClean="0"/>
-              <a:t>3/11/2025</a:t>
+              <a:t>3/24/2025</a:t>
             </a:fld>
             <a:endParaRPr lang="en-US" dirty="0"/>
           </a:p>
@@ -14798,7 +14816,7 @@
           <a:p>
             <a:fld id="{A5B0A250-5CC0-1746-B209-08E8B0DAE6AF}" type="datetimeFigureOut">
               <a:rPr lang="en-US" smtClean="0"/>
-              <a:t>3/11/2025</a:t>
+              <a:t>3/24/2025</a:t>
             </a:fld>
             <a:endParaRPr lang="en-US" dirty="0"/>
           </a:p>
@@ -14957,7 +14975,7 @@
             <a:fld id="{A5B0A250-5CC0-1746-B209-08E8B0DAE6AF}" type="datetimeFigureOut">
               <a:rPr lang="en-US" smtClean="0"/>
               <a:pPr/>
-              <a:t>3/11/2025</a:t>
+              <a:t>3/24/2025</a:t>
             </a:fld>
             <a:endParaRPr lang="en-US" dirty="0"/>
           </a:p>
@@ -15940,7 +15958,7 @@
           <a:p>
             <a:fld id="{A5B0A250-5CC0-1746-B209-08E8B0DAE6AF}" type="datetimeFigureOut">
               <a:rPr lang="en-US" smtClean="0"/>
-              <a:t>3/11/2025</a:t>
+              <a:t>3/24/2025</a:t>
             </a:fld>
             <a:endParaRPr lang="en-US" dirty="0"/>
           </a:p>
@@ -17002,7 +17020,7 @@
           <a:p>
             <a:fld id="{A5B0A250-5CC0-1746-B209-08E8B0DAE6AF}" type="datetimeFigureOut">
               <a:rPr lang="en-US" smtClean="0"/>
-              <a:t>3/11/2025</a:t>
+              <a:t>3/24/2025</a:t>
             </a:fld>
             <a:endParaRPr lang="en-US" dirty="0"/>
           </a:p>
@@ -17290,7 +17308,7 @@
             <a:fld id="{A5B0A250-5CC0-1746-B209-08E8B0DAE6AF}" type="datetimeFigureOut">
               <a:rPr lang="en-US" smtClean="0"/>
               <a:pPr/>
-              <a:t>3/11/2025</a:t>
+              <a:t>3/24/2025</a:t>
             </a:fld>
             <a:endParaRPr lang="en-US" dirty="0"/>
           </a:p>
@@ -19269,6 +19287,132 @@
 </p:sld>
 </file>
 
+<file path=ppt/slides/slide10.xml><?xml version="1.0" encoding="utf-8"?>
+<p:sld xmlns:a="http://schemas.openxmlformats.org/drawingml/2006/main" xmlns:r="http://schemas.openxmlformats.org/officeDocument/2006/relationships" xmlns:p="http://schemas.openxmlformats.org/presentationml/2006/main">
+  <p:cSld>
+    <p:spTree>
+      <p:nvGrpSpPr>
+        <p:cNvPr id="1" name=""/>
+        <p:cNvGrpSpPr/>
+        <p:nvPr/>
+      </p:nvGrpSpPr>
+      <p:grpSpPr>
+        <a:xfrm>
+          <a:off x="0" y="0"/>
+          <a:ext cx="0" cy="0"/>
+          <a:chOff x="0" y="0"/>
+          <a:chExt cx="0" cy="0"/>
+        </a:xfrm>
+      </p:grpSpPr>
+      <p:sp>
+        <p:nvSpPr>
+          <p:cNvPr id="14" name="文字方塊 13">
+            <a:hlinkClick r:id="rId2"/>
+            <a:extLst>
+              <a:ext uri="{FF2B5EF4-FFF2-40B4-BE49-F238E27FC236}">
+                <a16:creationId xmlns:a16="http://schemas.microsoft.com/office/drawing/2014/main" id="{7DED6F83-34BA-CE8B-67E3-95E93815577A}"/>
+              </a:ext>
+            </a:extLst>
+          </p:cNvPr>
+          <p:cNvSpPr txBox="1"/>
+          <p:nvPr/>
+        </p:nvSpPr>
+        <p:spPr>
+          <a:xfrm>
+            <a:off x="2612231" y="2767280"/>
+            <a:ext cx="6967538" cy="1323439"/>
+          </a:xfrm>
+          <a:prstGeom prst="rect">
+            <a:avLst/>
+          </a:prstGeom>
+          <a:noFill/>
+        </p:spPr>
+        <p:txBody>
+          <a:bodyPr wrap="square" rtlCol="0">
+            <a:spAutoFit/>
+          </a:bodyPr>
+          <a:lstStyle/>
+          <a:p>
+            <a:r>
+              <a:rPr lang="en-US" altLang="zh-TW" sz="4000" b="1" dirty="0" err="1">
+                <a:solidFill>
+                  <a:srgbClr val="2E6CA4"/>
+                </a:solidFill>
+                <a:effectLst/>
+                <a:latin typeface="Fira Code" pitchFamily="1" charset="0"/>
+                <a:ea typeface="Fira Code" pitchFamily="1" charset="0"/>
+                <a:cs typeface="Fira Code" pitchFamily="1" charset="0"/>
+              </a:rPr>
+              <a:t>Ciallo</a:t>
+            </a:r>
+            <a:r>
+              <a:rPr lang="zh-TW" altLang="en-US" sz="4000" b="1" dirty="0">
+                <a:solidFill>
+                  <a:srgbClr val="2E6CA4"/>
+                </a:solidFill>
+                <a:effectLst/>
+                <a:latin typeface="Fira Code" pitchFamily="1" charset="0"/>
+                <a:cs typeface="Fira Code" pitchFamily="1" charset="0"/>
+              </a:rPr>
+              <a:t>～</a:t>
+            </a:r>
+            <a:r>
+              <a:rPr lang="en-US" altLang="zh-TW" sz="4000" b="1" dirty="0">
+                <a:solidFill>
+                  <a:srgbClr val="2E6CA4"/>
+                </a:solidFill>
+                <a:effectLst/>
+                <a:latin typeface="Fira Code" pitchFamily="1" charset="0"/>
+                <a:ea typeface="Fira Code" pitchFamily="1" charset="0"/>
+                <a:cs typeface="Fira Code" pitchFamily="1" charset="0"/>
+              </a:rPr>
+              <a:t>(∠</a:t>
+            </a:r>
+            <a:r>
+              <a:rPr lang="zh-TW" altLang="en-US" sz="4000" b="1" dirty="0">
+                <a:solidFill>
+                  <a:srgbClr val="2E6CA4"/>
+                </a:solidFill>
+                <a:effectLst/>
+                <a:latin typeface="Fira Code" pitchFamily="1" charset="0"/>
+                <a:cs typeface="Fira Code" pitchFamily="1" charset="0"/>
+              </a:rPr>
+              <a:t>・</a:t>
+            </a:r>
+            <a:r>
+              <a:rPr lang="el-GR" altLang="zh-TW" sz="4000" b="1" dirty="0">
+                <a:solidFill>
+                  <a:srgbClr val="2E6CA4"/>
+                </a:solidFill>
+                <a:effectLst/>
+                <a:latin typeface="Fira Code" pitchFamily="1" charset="0"/>
+                <a:ea typeface="Fira Code" pitchFamily="1" charset="0"/>
+                <a:cs typeface="Fira Code" pitchFamily="1" charset="0"/>
+              </a:rPr>
+              <a:t>ω&lt; )⌒☆</a:t>
+            </a:r>
+          </a:p>
+          <a:p>
+            <a:endParaRPr lang="zh-TW" altLang="en-US" sz="4000" b="1" dirty="0">
+              <a:latin typeface="Fira Code" pitchFamily="1" charset="0"/>
+              <a:cs typeface="Fira Code" pitchFamily="1" charset="0"/>
+            </a:endParaRPr>
+          </a:p>
+        </p:txBody>
+      </p:sp>
+    </p:spTree>
+    <p:extLst>
+      <p:ext uri="{BB962C8B-B14F-4D97-AF65-F5344CB8AC3E}">
+        <p14:creationId xmlns:p14="http://schemas.microsoft.com/office/powerpoint/2010/main" val="160354930"/>
+      </p:ext>
+    </p:extLst>
+  </p:cSld>
+  <p:clrMapOvr>
+    <a:masterClrMapping/>
+  </p:clrMapOvr>
+</p:sld>
+</file>
+
 <file path=ppt/slides/slide2.xml><?xml version="1.0" encoding="utf-8"?>
 <p:sld xmlns:a="http://schemas.openxmlformats.org/drawingml/2006/main" xmlns:r="http://schemas.openxmlformats.org/officeDocument/2006/relationships" xmlns:p="http://schemas.openxmlformats.org/presentationml/2006/main">
   <p:cSld>
@@ -19339,14 +19483,14 @@
             <p:ph idx="1"/>
             <p:extLst>
               <p:ext uri="{D42A27DB-BD31-4B8C-83A1-F6EECF244321}">
-                <p14:modId xmlns:p14="http://schemas.microsoft.com/office/powerpoint/2010/main" val="1534418366"/>
+                <p14:modId xmlns:p14="http://schemas.microsoft.com/office/powerpoint/2010/main" val="508147858"/>
               </p:ext>
             </p:extLst>
           </p:nvPr>
         </p:nvGraphicFramePr>
         <p:xfrm>
-          <a:off x="565150" y="2160016"/>
-          <a:ext cx="7335835" cy="3601212"/>
+          <a:off x="565150" y="1472038"/>
+          <a:ext cx="10233479" cy="4615071"/>
         </p:xfrm>
         <a:graphic>
           <a:graphicData uri="http://schemas.openxmlformats.org/drawingml/2006/diagram">
@@ -19354,53 +19498,6 @@
           </a:graphicData>
         </a:graphic>
       </p:graphicFrame>
-      <p:sp>
-        <p:nvSpPr>
-          <p:cNvPr id="3" name="文字方塊 2">
-            <a:extLst>
-              <a:ext uri="{FF2B5EF4-FFF2-40B4-BE49-F238E27FC236}">
-                <a16:creationId xmlns:a16="http://schemas.microsoft.com/office/drawing/2014/main" id="{E0E4B76C-FDEF-557C-83B9-BF1917CD781E}"/>
-              </a:ext>
-            </a:extLst>
-          </p:cNvPr>
-          <p:cNvSpPr txBox="1"/>
-          <p:nvPr/>
-        </p:nvSpPr>
-        <p:spPr>
-          <a:xfrm>
-            <a:off x="2876139" y="4841966"/>
-            <a:ext cx="5024846" cy="369332"/>
-          </a:xfrm>
-          <a:prstGeom prst="rect">
-            <a:avLst/>
-          </a:prstGeom>
-          <a:noFill/>
-        </p:spPr>
-        <p:txBody>
-          <a:bodyPr wrap="square" rtlCol="0">
-            <a:spAutoFit/>
-          </a:bodyPr>
-          <a:lstStyle/>
-          <a:p>
-            <a:r>
-              <a:rPr lang="en-US" altLang="zh-TW" dirty="0">
-                <a:solidFill>
-                  <a:srgbClr val="FF0000"/>
-                </a:solidFill>
-              </a:rPr>
-              <a:t>※</a:t>
-            </a:r>
-            <a:r>
-              <a:rPr lang="zh-TW" altLang="en-US" dirty="0">
-                <a:solidFill>
-                  <a:srgbClr val="FF0000"/>
-                </a:solidFill>
-              </a:rPr>
-              <a:t>尚未串接資料庫，使用者資料僅存在後端</a:t>
-            </a:r>
-          </a:p>
-        </p:txBody>
-      </p:sp>
     </p:spTree>
     <p:extLst>
       <p:ext uri="{BB962C8B-B14F-4D97-AF65-F5344CB8AC3E}">
@@ -19415,6 +19512,134 @@
 </file>
 
 <file path=ppt/slides/slide3.xml><?xml version="1.0" encoding="utf-8"?>
+<p:sld xmlns:a="http://schemas.openxmlformats.org/drawingml/2006/main" xmlns:r="http://schemas.openxmlformats.org/officeDocument/2006/relationships" xmlns:p="http://schemas.openxmlformats.org/presentationml/2006/main">
+  <p:cSld>
+    <p:spTree>
+      <p:nvGrpSpPr>
+        <p:cNvPr id="1" name=""/>
+        <p:cNvGrpSpPr/>
+        <p:nvPr/>
+      </p:nvGrpSpPr>
+      <p:grpSpPr>
+        <a:xfrm>
+          <a:off x="0" y="0"/>
+          <a:ext cx="0" cy="0"/>
+          <a:chOff x="0" y="0"/>
+          <a:chExt cx="0" cy="0"/>
+        </a:xfrm>
+      </p:grpSpPr>
+      <p:sp>
+        <p:nvSpPr>
+          <p:cNvPr id="2" name="標題 1">
+            <a:extLst>
+              <a:ext uri="{FF2B5EF4-FFF2-40B4-BE49-F238E27FC236}">
+                <a16:creationId xmlns:a16="http://schemas.microsoft.com/office/drawing/2014/main" id="{3C94D390-E415-25BB-9472-C5E1F0ED89D0}"/>
+              </a:ext>
+            </a:extLst>
+          </p:cNvPr>
+          <p:cNvSpPr>
+            <a:spLocks noGrp="1"/>
+          </p:cNvSpPr>
+          <p:nvPr>
+            <p:ph type="title"/>
+          </p:nvPr>
+        </p:nvSpPr>
+        <p:spPr/>
+        <p:txBody>
+          <a:bodyPr/>
+          <a:lstStyle/>
+          <a:p>
+            <a:r>
+              <a:rPr lang="zh-TW" altLang="en-US" dirty="0"/>
+              <a:t>網路構成</a:t>
+            </a:r>
+          </a:p>
+        </p:txBody>
+      </p:sp>
+      <p:pic>
+        <p:nvPicPr>
+          <p:cNvPr id="25" name="內容版面配置區 24" descr="一張含有 文字, 圖表, 行, 螢幕擷取畫面 的圖片&#10;&#10;AI 產生的內容可能不正確。">
+            <a:extLst>
+              <a:ext uri="{FF2B5EF4-FFF2-40B4-BE49-F238E27FC236}">
+                <a16:creationId xmlns:a16="http://schemas.microsoft.com/office/drawing/2014/main" id="{5C9D4AA1-D1EF-821C-6977-81FC7AF9B9ED}"/>
+              </a:ext>
+            </a:extLst>
+          </p:cNvPr>
+          <p:cNvPicPr>
+            <a:picLocks noGrp="1" noChangeAspect="1"/>
+          </p:cNvPicPr>
+          <p:nvPr>
+            <p:ph idx="1"/>
+          </p:nvPr>
+        </p:nvPicPr>
+        <p:blipFill>
+          <a:blip r:embed="rId2">
+            <a:extLst>
+              <a:ext uri="{28A0092B-C50C-407E-A947-70E740481C1C}">
+                <a14:useLocalDpi xmlns:a14="http://schemas.microsoft.com/office/drawing/2010/main" val="0"/>
+              </a:ext>
+            </a:extLst>
+          </a:blip>
+          <a:stretch>
+            <a:fillRect/>
+          </a:stretch>
+        </p:blipFill>
+        <p:spPr>
+          <a:xfrm>
+            <a:off x="1288821" y="1405382"/>
+            <a:ext cx="8600613" cy="5316220"/>
+          </a:xfrm>
+        </p:spPr>
+      </p:pic>
+      <p:sp>
+        <p:nvSpPr>
+          <p:cNvPr id="26" name="文字方塊 25">
+            <a:extLst>
+              <a:ext uri="{FF2B5EF4-FFF2-40B4-BE49-F238E27FC236}">
+                <a16:creationId xmlns:a16="http://schemas.microsoft.com/office/drawing/2014/main" id="{A4FBA209-FFFC-91FE-92A5-3D211AD96132}"/>
+              </a:ext>
+            </a:extLst>
+          </p:cNvPr>
+          <p:cNvSpPr txBox="1"/>
+          <p:nvPr/>
+        </p:nvSpPr>
+        <p:spPr>
+          <a:xfrm>
+            <a:off x="6505303" y="1550126"/>
+            <a:ext cx="1800493" cy="369332"/>
+          </a:xfrm>
+          <a:prstGeom prst="rect">
+            <a:avLst/>
+          </a:prstGeom>
+          <a:noFill/>
+        </p:spPr>
+        <p:txBody>
+          <a:bodyPr wrap="none" rtlCol="0">
+            <a:spAutoFit/>
+          </a:bodyPr>
+          <a:lstStyle/>
+          <a:p>
+            <a:r>
+              <a:rPr lang="zh-TW" altLang="en-US" dirty="0"/>
+              <a:t>實驗室的虛擬機</a:t>
+            </a:r>
+          </a:p>
+        </p:txBody>
+      </p:sp>
+    </p:spTree>
+    <p:extLst>
+      <p:ext uri="{BB962C8B-B14F-4D97-AF65-F5344CB8AC3E}">
+        <p14:creationId xmlns:p14="http://schemas.microsoft.com/office/powerpoint/2010/main" val="700911506"/>
+      </p:ext>
+    </p:extLst>
+  </p:cSld>
+  <p:clrMapOvr>
+    <a:masterClrMapping/>
+  </p:clrMapOvr>
+</p:sld>
+</file>
+
+<file path=ppt/slides/slide4.xml><?xml version="1.0" encoding="utf-8"?>
 <p:sld xmlns:a="http://schemas.openxmlformats.org/drawingml/2006/main" xmlns:r="http://schemas.openxmlformats.org/officeDocument/2006/relationships" xmlns:p="http://schemas.openxmlformats.org/presentationml/2006/main">
   <p:cSld>
     <p:spTree>
@@ -20095,7 +20320,7 @@
 </p:sld>
 </file>
 
-<file path=ppt/slides/slide4.xml><?xml version="1.0" encoding="utf-8"?>
+<file path=ppt/slides/slide5.xml><?xml version="1.0" encoding="utf-8"?>
 <p:sld xmlns:a="http://schemas.openxmlformats.org/drawingml/2006/main" xmlns:r="http://schemas.openxmlformats.org/officeDocument/2006/relationships" xmlns:p="http://schemas.openxmlformats.org/presentationml/2006/main">
   <p:cSld>
     <p:spTree>
@@ -21059,7 +21284,7 @@
 </p:sld>
 </file>
 
-<file path=ppt/slides/slide5.xml><?xml version="1.0" encoding="utf-8"?>
+<file path=ppt/slides/slide6.xml><?xml version="1.0" encoding="utf-8"?>
 <p:sld xmlns:a="http://schemas.openxmlformats.org/drawingml/2006/main" xmlns:r="http://schemas.openxmlformats.org/officeDocument/2006/relationships" xmlns:p="http://schemas.openxmlformats.org/presentationml/2006/main">
   <p:cSld>
     <p:spTree>
@@ -22118,7 +22343,7 @@
 </p:sld>
 </file>
 
-<file path=ppt/slides/slide6.xml><?xml version="1.0" encoding="utf-8"?>
+<file path=ppt/slides/slide7.xml><?xml version="1.0" encoding="utf-8"?>
 <p:sld xmlns:a="http://schemas.openxmlformats.org/drawingml/2006/main" xmlns:r="http://schemas.openxmlformats.org/officeDocument/2006/relationships" xmlns:p="http://schemas.openxmlformats.org/presentationml/2006/main">
   <p:cSld>
     <p:spTree>
@@ -22727,7 +22952,7 @@
 </p:sld>
 </file>
 
-<file path=ppt/slides/slide7.xml><?xml version="1.0" encoding="utf-8"?>
+<file path=ppt/slides/slide8.xml><?xml version="1.0" encoding="utf-8"?>
 <p:sld xmlns:a="http://schemas.openxmlformats.org/drawingml/2006/main" xmlns:r="http://schemas.openxmlformats.org/officeDocument/2006/relationships" xmlns:p="http://schemas.openxmlformats.org/presentationml/2006/main">
   <p:cSld>
     <p:spTree>
@@ -23622,7 +23847,7 @@
 </p:sld>
 </file>
 
-<file path=ppt/slides/slide8.xml><?xml version="1.0" encoding="utf-8"?>
+<file path=ppt/slides/slide9.xml><?xml version="1.0" encoding="utf-8"?>
 <p:sld xmlns:a="http://schemas.openxmlformats.org/drawingml/2006/main" xmlns:r="http://schemas.openxmlformats.org/officeDocument/2006/relationships" xmlns:p="http://schemas.openxmlformats.org/presentationml/2006/main">
   <p:cSld>
     <p:spTree>

--- a/Yubico_Fido2_Demo介紹.pptx
+++ b/Yubico_Fido2_Demo介紹.pptx
@@ -5,7 +5,7 @@
     <p:sldMasterId id="2147483714" r:id="rId1"/>
   </p:sldMasterIdLst>
   <p:notesMasterIdLst>
-    <p:notesMasterId r:id="rId12"/>
+    <p:notesMasterId r:id="rId14"/>
   </p:notesMasterIdLst>
   <p:sldIdLst>
     <p:sldId id="256" r:id="rId2"/>
@@ -17,7 +17,9 @@
     <p:sldId id="273" r:id="rId8"/>
     <p:sldId id="271" r:id="rId9"/>
     <p:sldId id="270" r:id="rId10"/>
-    <p:sldId id="275" r:id="rId11"/>
+    <p:sldId id="276" r:id="rId11"/>
+    <p:sldId id="277" r:id="rId12"/>
+    <p:sldId id="275" r:id="rId13"/>
   </p:sldIdLst>
   <p:sldSz cx="12192000" cy="6858000"/>
   <p:notesSz cx="6858000" cy="9144000"/>
@@ -964,8 +966,16 @@
             <a:t>、</a:t>
           </a:r>
           <a:r>
+            <a:rPr lang="en-US" altLang="zh-TW" b="0" i="0" dirty="0" err="1"/>
+            <a:t>Yubico</a:t>
+          </a:r>
+          <a:r>
+            <a:rPr lang="en-US" altLang="zh-TW" b="0" i="0" dirty="0"/>
+            <a:t> F</a:t>
+          </a:r>
+          <a:r>
             <a:rPr lang="en-US" b="0" i="0" dirty="0"/>
-            <a:t>fido2</a:t>
+            <a:t>ido2</a:t>
           </a:r>
           <a:r>
             <a:rPr lang="zh-TW" altLang="en-US" b="0" i="0" dirty="0"/>
@@ -1476,8 +1486,16 @@
             <a:t>、</a:t>
           </a:r>
           <a:r>
+            <a:rPr lang="en-US" altLang="zh-TW" sz="2500" b="0" i="0" kern="1200" dirty="0" err="1"/>
+            <a:t>Yubico</a:t>
+          </a:r>
+          <a:r>
+            <a:rPr lang="en-US" altLang="zh-TW" sz="2500" b="0" i="0" kern="1200" dirty="0"/>
+            <a:t> F</a:t>
+          </a:r>
+          <a:r>
             <a:rPr lang="en-US" sz="2500" b="0" i="0" kern="1200" dirty="0"/>
-            <a:t>fido2</a:t>
+            <a:t>ido2</a:t>
           </a:r>
           <a:r>
             <a:rPr lang="zh-TW" altLang="en-US" sz="2500" b="0" i="0" kern="1200" dirty="0"/>
@@ -19304,6 +19322,136 @@
           <a:chExt cx="0" cy="0"/>
         </a:xfrm>
       </p:grpSpPr>
+      <p:pic>
+        <p:nvPicPr>
+          <p:cNvPr id="5" name="內容版面配置區 4" descr="一張含有 螢幕擷取畫面, 文字, 圖表, 設計 的圖片&#10;&#10;AI 產生的內容可能不正確。">
+            <a:extLst>
+              <a:ext uri="{FF2B5EF4-FFF2-40B4-BE49-F238E27FC236}">
+                <a16:creationId xmlns:a16="http://schemas.microsoft.com/office/drawing/2014/main" id="{44E9900B-28E2-FD24-BECD-B508CE1C1968}"/>
+              </a:ext>
+            </a:extLst>
+          </p:cNvPr>
+          <p:cNvPicPr>
+            <a:picLocks noGrp="1" noChangeAspect="1"/>
+          </p:cNvPicPr>
+          <p:nvPr>
+            <p:ph idx="1"/>
+          </p:nvPr>
+        </p:nvPicPr>
+        <p:blipFill>
+          <a:blip r:embed="rId2">
+            <a:extLst>
+              <a:ext uri="{28A0092B-C50C-407E-A947-70E740481C1C}">
+                <a14:useLocalDpi xmlns:a14="http://schemas.microsoft.com/office/drawing/2010/main" val="0"/>
+              </a:ext>
+            </a:extLst>
+          </a:blip>
+          <a:srcRect b="26796"/>
+          <a:stretch/>
+        </p:blipFill>
+        <p:spPr>
+          <a:xfrm>
+            <a:off x="467102" y="84617"/>
+            <a:ext cx="10616914" cy="6534844"/>
+          </a:xfrm>
+        </p:spPr>
+      </p:pic>
+    </p:spTree>
+    <p:extLst>
+      <p:ext uri="{BB962C8B-B14F-4D97-AF65-F5344CB8AC3E}">
+        <p14:creationId xmlns:p14="http://schemas.microsoft.com/office/powerpoint/2010/main" val="3748938571"/>
+      </p:ext>
+    </p:extLst>
+  </p:cSld>
+  <p:clrMapOvr>
+    <a:masterClrMapping/>
+  </p:clrMapOvr>
+</p:sld>
+</file>
+
+<file path=ppt/slides/slide11.xml><?xml version="1.0" encoding="utf-8"?>
+<p:sld xmlns:a="http://schemas.openxmlformats.org/drawingml/2006/main" xmlns:r="http://schemas.openxmlformats.org/officeDocument/2006/relationships" xmlns:p="http://schemas.openxmlformats.org/presentationml/2006/main">
+  <p:cSld>
+    <p:spTree>
+      <p:nvGrpSpPr>
+        <p:cNvPr id="1" name=""/>
+        <p:cNvGrpSpPr/>
+        <p:nvPr/>
+      </p:nvGrpSpPr>
+      <p:grpSpPr>
+        <a:xfrm>
+          <a:off x="0" y="0"/>
+          <a:ext cx="0" cy="0"/>
+          <a:chOff x="0" y="0"/>
+          <a:chExt cx="0" cy="0"/>
+        </a:xfrm>
+      </p:grpSpPr>
+      <p:pic>
+        <p:nvPicPr>
+          <p:cNvPr id="5" name="圖片 4" descr="一張含有 文字, 螢幕擷取畫面, 圖表, 數字 的圖片&#10;&#10;AI 產生的內容可能不正確。">
+            <a:extLst>
+              <a:ext uri="{FF2B5EF4-FFF2-40B4-BE49-F238E27FC236}">
+                <a16:creationId xmlns:a16="http://schemas.microsoft.com/office/drawing/2014/main" id="{10BFF4F0-6BDC-DD96-FD77-D0EF9ED0536F}"/>
+              </a:ext>
+            </a:extLst>
+          </p:cNvPr>
+          <p:cNvPicPr>
+            <a:picLocks noChangeAspect="1"/>
+          </p:cNvPicPr>
+          <p:nvPr/>
+        </p:nvPicPr>
+        <p:blipFill>
+          <a:blip r:embed="rId2">
+            <a:extLst>
+              <a:ext uri="{28A0092B-C50C-407E-A947-70E740481C1C}">
+                <a14:useLocalDpi xmlns:a14="http://schemas.microsoft.com/office/drawing/2010/main" val="0"/>
+              </a:ext>
+            </a:extLst>
+          </a:blip>
+          <a:stretch>
+            <a:fillRect/>
+          </a:stretch>
+        </p:blipFill>
+        <p:spPr>
+          <a:xfrm>
+            <a:off x="1477623" y="216616"/>
+            <a:ext cx="8521142" cy="6424768"/>
+          </a:xfrm>
+          <a:prstGeom prst="rect">
+            <a:avLst/>
+          </a:prstGeom>
+        </p:spPr>
+      </p:pic>
+    </p:spTree>
+    <p:extLst>
+      <p:ext uri="{BB962C8B-B14F-4D97-AF65-F5344CB8AC3E}">
+        <p14:creationId xmlns:p14="http://schemas.microsoft.com/office/powerpoint/2010/main" val="571592476"/>
+      </p:ext>
+    </p:extLst>
+  </p:cSld>
+  <p:clrMapOvr>
+    <a:masterClrMapping/>
+  </p:clrMapOvr>
+</p:sld>
+</file>
+
+<file path=ppt/slides/slide12.xml><?xml version="1.0" encoding="utf-8"?>
+<p:sld xmlns:a="http://schemas.openxmlformats.org/drawingml/2006/main" xmlns:r="http://schemas.openxmlformats.org/officeDocument/2006/relationships" xmlns:p="http://schemas.openxmlformats.org/presentationml/2006/main">
+  <p:cSld>
+    <p:spTree>
+      <p:nvGrpSpPr>
+        <p:cNvPr id="1" name=""/>
+        <p:cNvGrpSpPr/>
+        <p:nvPr/>
+      </p:nvGrpSpPr>
+      <p:grpSpPr>
+        <a:xfrm>
+          <a:off x="0" y="0"/>
+          <a:ext cx="0" cy="0"/>
+          <a:chOff x="0" y="0"/>
+          <a:chExt cx="0" cy="0"/>
+        </a:xfrm>
+      </p:grpSpPr>
       <p:sp>
         <p:nvSpPr>
           <p:cNvPr id="14" name="文字方塊 13">
@@ -19483,7 +19631,7 @@
             <p:ph idx="1"/>
             <p:extLst>
               <p:ext uri="{D42A27DB-BD31-4B8C-83A1-F6EECF244321}">
-                <p14:modId xmlns:p14="http://schemas.microsoft.com/office/powerpoint/2010/main" val="508147858"/>
+                <p14:modId xmlns:p14="http://schemas.microsoft.com/office/powerpoint/2010/main" val="3039159654"/>
               </p:ext>
             </p:extLst>
           </p:nvPr>
@@ -19820,7 +19968,7 @@
         </p:nvCxnSpPr>
         <p:spPr>
           <a:xfrm>
-            <a:off x="2342382" y="2409206"/>
+            <a:off x="2323190" y="2227973"/>
             <a:ext cx="1323347" cy="1"/>
           </a:xfrm>
           <a:prstGeom prst="straightConnector1">
@@ -19865,7 +20013,7 @@
         </p:nvSpPr>
         <p:spPr>
           <a:xfrm>
-            <a:off x="2317001" y="2039874"/>
+            <a:off x="2342382" y="1932584"/>
             <a:ext cx="1284964" cy="369332"/>
           </a:xfrm>
           <a:prstGeom prst="rect">
@@ -20556,7 +20704,7 @@
         </p:nvCxnSpPr>
         <p:spPr>
           <a:xfrm>
-            <a:off x="2342382" y="2409206"/>
+            <a:off x="2338553" y="2280108"/>
             <a:ext cx="1323347" cy="1"/>
           </a:xfrm>
           <a:prstGeom prst="straightConnector1">
@@ -20601,7 +20749,7 @@
         </p:nvSpPr>
         <p:spPr>
           <a:xfrm>
-            <a:off x="2317001" y="2039874"/>
+            <a:off x="2313172" y="1910776"/>
             <a:ext cx="1284964" cy="369332"/>
           </a:xfrm>
           <a:prstGeom prst="rect">
@@ -21512,7 +21660,7 @@
         </p:nvCxnSpPr>
         <p:spPr>
           <a:xfrm>
-            <a:off x="2342382" y="2409206"/>
+            <a:off x="2333815" y="2262440"/>
             <a:ext cx="1323347" cy="1"/>
           </a:xfrm>
           <a:prstGeom prst="straightConnector1">
@@ -21557,7 +21705,7 @@
         </p:nvSpPr>
         <p:spPr>
           <a:xfrm>
-            <a:off x="2317001" y="2039874"/>
+            <a:off x="2308434" y="1893108"/>
             <a:ext cx="1284964" cy="369332"/>
           </a:xfrm>
           <a:prstGeom prst="rect">
@@ -22524,7 +22672,7 @@
         </p:nvCxnSpPr>
         <p:spPr>
           <a:xfrm>
-            <a:off x="2342382" y="2409206"/>
+            <a:off x="2338553" y="2265235"/>
             <a:ext cx="1323347" cy="1"/>
           </a:xfrm>
           <a:prstGeom prst="straightConnector1">
@@ -22569,7 +22717,7 @@
         </p:nvSpPr>
         <p:spPr>
           <a:xfrm>
-            <a:off x="2317001" y="2039874"/>
+            <a:off x="2313172" y="1895903"/>
             <a:ext cx="1284964" cy="369332"/>
           </a:xfrm>
           <a:prstGeom prst="rect">
@@ -23180,7 +23328,7 @@
         </p:nvCxnSpPr>
         <p:spPr>
           <a:xfrm>
-            <a:off x="2342382" y="2409206"/>
+            <a:off x="2342382" y="2315749"/>
             <a:ext cx="1323347" cy="1"/>
           </a:xfrm>
           <a:prstGeom prst="straightConnector1">
@@ -23225,7 +23373,7 @@
         </p:nvSpPr>
         <p:spPr>
           <a:xfrm>
-            <a:off x="2317001" y="2039874"/>
+            <a:off x="2317001" y="1946417"/>
             <a:ext cx="1284964" cy="369332"/>
           </a:xfrm>
           <a:prstGeom prst="rect">
@@ -24075,7 +24223,7 @@
         </p:nvCxnSpPr>
         <p:spPr>
           <a:xfrm>
-            <a:off x="2342382" y="2409206"/>
+            <a:off x="2342382" y="2275365"/>
             <a:ext cx="1323347" cy="1"/>
           </a:xfrm>
           <a:prstGeom prst="straightConnector1">
@@ -24120,7 +24268,7 @@
         </p:nvSpPr>
         <p:spPr>
           <a:xfrm>
-            <a:off x="2317001" y="2039874"/>
+            <a:off x="2317001" y="1906033"/>
             <a:ext cx="1284964" cy="369332"/>
           </a:xfrm>
           <a:prstGeom prst="rect">
